--- a/downloads/company-profile.pptx
+++ b/downloads/company-profile.pptx
@@ -1695,7 +1695,7 @@
                 <a:ea typeface="Calibri" pitchFamily="34" charset="-122"/>
                 <a:cs typeface="Calibri" pitchFamily="34" charset="-120"/>
               </a:rPr>
-              <a:t>אנחנו צוות מומחים המספק פתרונות עסקיים מותאמים אישית ללקוחות בכל הגדלים. הגישה שלנו משלבת ניסיון מקצועי מעמיק עם הבנה עסקית אמיתית, כדי לספק תוצאות מדידות שמניעות צמיחה.</a:t>
+              <a:t>אנחנו צוות מומחים שמספק פתרונות עסקיים מותאמים אישית לעסקים מכל הגדלים. הגישה שלנו משלבת ניסיון מקצועי מעמיק עם הבנה עסקית אמיתית, כדי להשיג תוצאות מדידות שמניעות צמיחה.</a:t>
             </a:r>
             <a:endParaRPr lang="en-US" sz="1500" dirty="0"/>
           </a:p>
@@ -2227,7 +2227,7 @@
         <p:spPr>
           <a:xfrm>
             <a:off x="640080" y="457200"/>
-            <a:ext cx="7315200" cy="731520"/>
+            <a:ext cx="10908792" cy="731520"/>
           </a:xfrm>
           <a:prstGeom prst="rect">
             <a:avLst/>
@@ -2266,7 +2266,7 @@
         <p:spPr>
           <a:xfrm>
             <a:off x="640080" y="1051560"/>
-            <a:ext cx="7315200" cy="365760"/>
+            <a:ext cx="10908792" cy="365760"/>
           </a:xfrm>
           <a:prstGeom prst="rect">
             <a:avLst/>
@@ -2941,7 +2941,7 @@
         <p:spPr>
           <a:xfrm>
             <a:off x="640080" y="457200"/>
-            <a:ext cx="7315200" cy="731520"/>
+            <a:ext cx="10908792" cy="731520"/>
           </a:xfrm>
           <a:prstGeom prst="rect">
             <a:avLst/>
@@ -2996,13 +2996,13 @@
       </p:sp>
       <p:sp>
         <p:nvSpPr>
-          <p:cNvPr id="4" name="Shape 2"/>
-          <p:cNvSpPr/>
-          <p:nvPr/>
-        </p:nvSpPr>
-        <p:spPr>
-          <a:xfrm>
-            <a:off x="1588770" y="2971800"/>
+          <p:cNvPr id="16" name="Shape 14"/>
+          <p:cNvSpPr/>
+          <p:nvPr/>
+        </p:nvSpPr>
+        <p:spPr>
+          <a:xfrm>
+            <a:off x="9749790" y="2971800"/>
             <a:ext cx="822960" cy="822960"/>
           </a:xfrm>
           <a:prstGeom prst="ellipse">
@@ -3021,13 +3021,13 @@
       </p:sp>
       <p:sp>
         <p:nvSpPr>
-          <p:cNvPr id="5" name="Text 3"/>
-          <p:cNvSpPr/>
-          <p:nvPr/>
-        </p:nvSpPr>
-        <p:spPr>
-          <a:xfrm>
-            <a:off x="1588770" y="2971800"/>
+          <p:cNvPr id="17" name="Text 15"/>
+          <p:cNvSpPr/>
+          <p:nvPr/>
+        </p:nvSpPr>
+        <p:spPr>
+          <a:xfrm>
+            <a:off x="9749790" y="2971800"/>
             <a:ext cx="822960" cy="822960"/>
           </a:xfrm>
           <a:prstGeom prst="rect">
@@ -3057,13 +3057,13 @@
       </p:sp>
       <p:sp>
         <p:nvSpPr>
-          <p:cNvPr id="6" name="Text 4"/>
-          <p:cNvSpPr/>
-          <p:nvPr/>
-        </p:nvSpPr>
-        <p:spPr>
-          <a:xfrm>
-            <a:off x="731520" y="4023360"/>
+          <p:cNvPr id="18" name="Text 16"/>
+          <p:cNvSpPr/>
+          <p:nvPr/>
+        </p:nvSpPr>
+        <p:spPr>
+          <a:xfrm>
+            <a:off x="8892540" y="4023360"/>
             <a:ext cx="2537460" cy="365760"/>
           </a:xfrm>
           <a:prstGeom prst="rect">
@@ -3096,13 +3096,13 @@
       </p:sp>
       <p:sp>
         <p:nvSpPr>
-          <p:cNvPr id="7" name="Text 5"/>
-          <p:cNvSpPr/>
-          <p:nvPr/>
-        </p:nvSpPr>
-        <p:spPr>
-          <a:xfrm>
-            <a:off x="777240" y="4434840"/>
+          <p:cNvPr id="19" name="Text 17"/>
+          <p:cNvSpPr/>
+          <p:nvPr/>
+        </p:nvSpPr>
+        <p:spPr>
+          <a:xfrm>
+            <a:off x="8938260" y="4434840"/>
             <a:ext cx="2446020" cy="822960"/>
           </a:xfrm>
           <a:prstGeom prst="rect">
@@ -3135,13 +3135,13 @@
       </p:sp>
       <p:sp>
         <p:nvSpPr>
-          <p:cNvPr id="8" name="Shape 6"/>
-          <p:cNvSpPr/>
-          <p:nvPr/>
-        </p:nvSpPr>
-        <p:spPr>
-          <a:xfrm>
-            <a:off x="4309110" y="2971800"/>
+          <p:cNvPr id="12" name="Shape 10"/>
+          <p:cNvSpPr/>
+          <p:nvPr/>
+        </p:nvSpPr>
+        <p:spPr>
+          <a:xfrm>
+            <a:off x="7029450" y="2971800"/>
             <a:ext cx="822960" cy="822960"/>
           </a:xfrm>
           <a:prstGeom prst="ellipse">
@@ -3160,13 +3160,13 @@
       </p:sp>
       <p:sp>
         <p:nvSpPr>
-          <p:cNvPr id="9" name="Text 7"/>
-          <p:cNvSpPr/>
-          <p:nvPr/>
-        </p:nvSpPr>
-        <p:spPr>
-          <a:xfrm>
-            <a:off x="4309110" y="2971800"/>
+          <p:cNvPr id="13" name="Text 11"/>
+          <p:cNvSpPr/>
+          <p:nvPr/>
+        </p:nvSpPr>
+        <p:spPr>
+          <a:xfrm>
+            <a:off x="7029450" y="2971800"/>
             <a:ext cx="822960" cy="822960"/>
           </a:xfrm>
           <a:prstGeom prst="rect">
@@ -3196,13 +3196,13 @@
       </p:sp>
       <p:sp>
         <p:nvSpPr>
-          <p:cNvPr id="10" name="Text 8"/>
-          <p:cNvSpPr/>
-          <p:nvPr/>
-        </p:nvSpPr>
-        <p:spPr>
-          <a:xfrm>
-            <a:off x="3451860" y="4023360"/>
+          <p:cNvPr id="14" name="Text 12"/>
+          <p:cNvSpPr/>
+          <p:nvPr/>
+        </p:nvSpPr>
+        <p:spPr>
+          <a:xfrm>
+            <a:off x="6172200" y="4023360"/>
             <a:ext cx="2537460" cy="365760"/>
           </a:xfrm>
           <a:prstGeom prst="rect">
@@ -3235,13 +3235,13 @@
       </p:sp>
       <p:sp>
         <p:nvSpPr>
-          <p:cNvPr id="11" name="Text 9"/>
-          <p:cNvSpPr/>
-          <p:nvPr/>
-        </p:nvSpPr>
-        <p:spPr>
-          <a:xfrm>
-            <a:off x="3497580" y="4434840"/>
+          <p:cNvPr id="15" name="Text 13"/>
+          <p:cNvSpPr/>
+          <p:nvPr/>
+        </p:nvSpPr>
+        <p:spPr>
+          <a:xfrm>
+            <a:off x="6217920" y="4434840"/>
             <a:ext cx="2446020" cy="822960"/>
           </a:xfrm>
           <a:prstGeom prst="rect">
@@ -3274,13 +3274,13 @@
       </p:sp>
       <p:sp>
         <p:nvSpPr>
-          <p:cNvPr id="12" name="Shape 10"/>
-          <p:cNvSpPr/>
-          <p:nvPr/>
-        </p:nvSpPr>
-        <p:spPr>
-          <a:xfrm>
-            <a:off x="7029450" y="2971800"/>
+          <p:cNvPr id="8" name="Shape 6"/>
+          <p:cNvSpPr/>
+          <p:nvPr/>
+        </p:nvSpPr>
+        <p:spPr>
+          <a:xfrm>
+            <a:off x="4309110" y="2971800"/>
             <a:ext cx="822960" cy="822960"/>
           </a:xfrm>
           <a:prstGeom prst="ellipse">
@@ -3299,13 +3299,13 @@
       </p:sp>
       <p:sp>
         <p:nvSpPr>
-          <p:cNvPr id="13" name="Text 11"/>
-          <p:cNvSpPr/>
-          <p:nvPr/>
-        </p:nvSpPr>
-        <p:spPr>
-          <a:xfrm>
-            <a:off x="7029450" y="2971800"/>
+          <p:cNvPr id="9" name="Text 7"/>
+          <p:cNvSpPr/>
+          <p:nvPr/>
+        </p:nvSpPr>
+        <p:spPr>
+          <a:xfrm>
+            <a:off x="4309110" y="2971800"/>
             <a:ext cx="822960" cy="822960"/>
           </a:xfrm>
           <a:prstGeom prst="rect">
@@ -3335,13 +3335,13 @@
       </p:sp>
       <p:sp>
         <p:nvSpPr>
-          <p:cNvPr id="14" name="Text 12"/>
-          <p:cNvSpPr/>
-          <p:nvPr/>
-        </p:nvSpPr>
-        <p:spPr>
-          <a:xfrm>
-            <a:off x="6172200" y="4023360"/>
+          <p:cNvPr id="10" name="Text 8"/>
+          <p:cNvSpPr/>
+          <p:nvPr/>
+        </p:nvSpPr>
+        <p:spPr>
+          <a:xfrm>
+            <a:off x="3451860" y="4023360"/>
             <a:ext cx="2537460" cy="365760"/>
           </a:xfrm>
           <a:prstGeom prst="rect">
@@ -3374,13 +3374,13 @@
       </p:sp>
       <p:sp>
         <p:nvSpPr>
-          <p:cNvPr id="15" name="Text 13"/>
-          <p:cNvSpPr/>
-          <p:nvPr/>
-        </p:nvSpPr>
-        <p:spPr>
-          <a:xfrm>
-            <a:off x="6217920" y="4434840"/>
+          <p:cNvPr id="11" name="Text 9"/>
+          <p:cNvSpPr/>
+          <p:nvPr/>
+        </p:nvSpPr>
+        <p:spPr>
+          <a:xfrm>
+            <a:off x="3497580" y="4434840"/>
             <a:ext cx="2446020" cy="822960"/>
           </a:xfrm>
           <a:prstGeom prst="rect">
@@ -3413,13 +3413,13 @@
       </p:sp>
       <p:sp>
         <p:nvSpPr>
-          <p:cNvPr id="16" name="Shape 14"/>
-          <p:cNvSpPr/>
-          <p:nvPr/>
-        </p:nvSpPr>
-        <p:spPr>
-          <a:xfrm>
-            <a:off x="9749790" y="2971800"/>
+          <p:cNvPr id="4" name="Shape 2"/>
+          <p:cNvSpPr/>
+          <p:nvPr/>
+        </p:nvSpPr>
+        <p:spPr>
+          <a:xfrm>
+            <a:off x="1588770" y="2971800"/>
             <a:ext cx="822960" cy="822960"/>
           </a:xfrm>
           <a:prstGeom prst="ellipse">
@@ -3438,13 +3438,13 @@
       </p:sp>
       <p:sp>
         <p:nvSpPr>
-          <p:cNvPr id="17" name="Text 15"/>
-          <p:cNvSpPr/>
-          <p:nvPr/>
-        </p:nvSpPr>
-        <p:spPr>
-          <a:xfrm>
-            <a:off x="9749790" y="2971800"/>
+          <p:cNvPr id="5" name="Text 3"/>
+          <p:cNvSpPr/>
+          <p:nvPr/>
+        </p:nvSpPr>
+        <p:spPr>
+          <a:xfrm>
+            <a:off x="1588770" y="2971800"/>
             <a:ext cx="822960" cy="822960"/>
           </a:xfrm>
           <a:prstGeom prst="rect">
@@ -3474,13 +3474,13 @@
       </p:sp>
       <p:sp>
         <p:nvSpPr>
-          <p:cNvPr id="18" name="Text 16"/>
-          <p:cNvSpPr/>
-          <p:nvPr/>
-        </p:nvSpPr>
-        <p:spPr>
-          <a:xfrm>
-            <a:off x="8892540" y="4023360"/>
+          <p:cNvPr id="6" name="Text 4"/>
+          <p:cNvSpPr/>
+          <p:nvPr/>
+        </p:nvSpPr>
+        <p:spPr>
+          <a:xfrm>
+            <a:off x="731520" y="4023360"/>
             <a:ext cx="2537460" cy="365760"/>
           </a:xfrm>
           <a:prstGeom prst="rect">
@@ -3513,13 +3513,13 @@
       </p:sp>
       <p:sp>
         <p:nvSpPr>
-          <p:cNvPr id="19" name="Text 17"/>
-          <p:cNvSpPr/>
-          <p:nvPr/>
-        </p:nvSpPr>
-        <p:spPr>
-          <a:xfrm>
-            <a:off x="8938260" y="4434840"/>
+          <p:cNvPr id="7" name="Text 5"/>
+          <p:cNvSpPr/>
+          <p:nvPr/>
+        </p:nvSpPr>
+        <p:spPr>
+          <a:xfrm>
+            <a:off x="777240" y="4434840"/>
             <a:ext cx="2446020" cy="822960"/>
           </a:xfrm>
           <a:prstGeom prst="rect">
@@ -4078,7 +4078,7 @@
         <p:spPr>
           <a:xfrm>
             <a:off x="640080" y="457200"/>
-            <a:ext cx="7315200" cy="731520"/>
+            <a:ext cx="10908792" cy="731520"/>
           </a:xfrm>
           <a:prstGeom prst="rect">
             <a:avLst/>
@@ -4117,7 +4117,7 @@
         <p:spPr>
           <a:xfrm>
             <a:off x="640080" y="1051560"/>
-            <a:ext cx="7315200" cy="365760"/>
+            <a:ext cx="10908792" cy="365760"/>
           </a:xfrm>
           <a:prstGeom prst="rect">
             <a:avLst/>
